--- a/docs/user-manual.pptx
+++ b/docs/user-manual.pptx
@@ -12881,7 +12881,7 @@
               </a:defRPr>
             </a:pPr>
             <a:r>
-              <a:t>10秒</a:t>
+              <a:t>30秒</a:t>
             </a:r>
           </a:p>
         </p:txBody>
@@ -12916,11 +12916,11 @@
               </a:defRPr>
             </a:pPr>
             <a:r>
-              <a:t>承認・検収</a:t>
+              <a:t>検収・証憑</a:t>
             </a:r>
             <a:br/>
             <a:r>
-              <a:t>ボタンを押すだけ</a:t>
+              <a:t>ボタン＋ファイル添付だけ</a:t>
             </a:r>
           </a:p>
         </p:txBody>
@@ -13080,7 +13080,7 @@
             </a:r>
             <a:br/>
             <a:r>
-              <a:t>⑥⑦⑧は管理本部が対応</a:t>
+              <a:t>②承認は部門長、⑥⑦⑧は管理本部</a:t>
             </a:r>
           </a:p>
         </p:txBody>

--- a/docs/user-manual.pptx
+++ b/docs/user-manual.pptx
@@ -6508,6 +6508,10 @@
             <a:r>
               <a:t>/ JAL Online</a:t>
             </a:r>
+            <a:br/>
+            <a:r>
+              <a:t>/ レンタカー / タイムズカー</a:t>
+            </a:r>
           </a:p>
         </p:txBody>
       </p:sp>
@@ -6714,11 +6718,11 @@
               </a:defRPr>
             </a:pPr>
             <a:r>
-              <a:t>交通費・食事代も</a:t>
+              <a:t>交通費・レンタカー・</a:t>
             </a:r>
             <a:br/>
             <a:r>
-              <a:t>カードで</a:t>
+              <a:t>食事代もカードで</a:t>
             </a:r>
           </a:p>
         </p:txBody>
@@ -16642,6 +16646,9 @@
                           </a:solidFill>
                         </a:defRPr>
                       </a:pPr>
+                      <a:r>
+                        <a:t>★</a:t>
+                      </a:r>
                     </a:p>
                   </a:txBody>
                   <a:tcPr>

--- a/docs/user-manual.pptx
+++ b/docs/user-manual.pptx
@@ -3245,7 +3245,7 @@
             </a:r>
             <a:br/>
             <a:r>
-              <a:t>v1.0 — 2026-03-28</a:t>
+              <a:t>v2.0 — 2026-04-12（Supabase版）</a:t>
             </a:r>
           </a:p>
         </p:txBody>
@@ -8344,7 +8344,7 @@
               </a:defRPr>
             </a:pPr>
             <a:r>
-              <a:t>/trip を入力</a:t>
+              <a:t>/trip/new（Webフォーム）にアクセス</a:t>
             </a:r>
           </a:p>
         </p:txBody>
@@ -8556,7 +8556,7 @@
               </a:defRPr>
             </a:pPr>
             <a:r>
-              <a:t>モーダルに入力</a:t>
+              <a:t>フォームに入力（AI自動入力可）</a:t>
             </a:r>
           </a:p>
         </p:txBody>
@@ -10811,7 +10811,7 @@
                         </a:defRPr>
                       </a:pPr>
                       <a:r>
-                        <a:t>EX予約の場合はICカードで乗車</a:t>
+                        <a:t>EX予約はICカード乗車</a:t>
                       </a:r>
                     </a:p>
                   </a:txBody>
@@ -11486,7 +11486,7 @@
               </a:defRPr>
             </a:pPr>
             <a:r>
-              <a:t>楽天トラベルRacco も今後利用可能になります</a:t>
+              <a:t>楽天トラベルRacco も利用可能（予約リンク生成対応済み）</a:t>
             </a:r>
           </a:p>
           <a:p>
@@ -11554,7 +11554,7 @@
               </a:defRPr>
             </a:pPr>
             <a:r>
-              <a:t>立替が発生した場合 → /purchase「購入済」で申請</a:t>
+              <a:t>立替が発生した場合 → /expense/new で立替精算申請</a:t>
             </a:r>
           </a:p>
         </p:txBody>
@@ -18585,7 +18585,7 @@
               </a:defRPr>
             </a:pPr>
             <a:r>
-              <a:t>Phase 1: 予測マッチング — 承認時にcard_last4×金額×日付を自動記録</a:t>
+              <a:t>Phase 1: 予測マッチング — 承認時にoffice_member_id×金額×日付を自動記録</a:t>
             </a:r>
           </a:p>
           <a:p>
@@ -21326,7 +21326,7 @@
                         </a:defRPr>
                       </a:pPr>
                       <a:r>
-                        <a:t>/trip → モーダル</a:t>
+                        <a:t>/trip/new + AIアシスタント</a:t>
                       </a:r>
                     </a:p>
                   </a:txBody>

--- a/docs/user-manual.pptx
+++ b/docs/user-manual.pptx
@@ -59,6 +59,7 @@
     <p:sldId id="307" r:id="rId58"/>
     <p:sldId id="308" r:id="rId59"/>
     <p:sldId id="309" r:id="rId60"/>
+    <p:sldId id="310" r:id="rId61"/>
   </p:sldIdLst>
   <p:sldSz cx="12191695" cy="6858000" type="screen4x3"/>
   <p:notesSz cx="6858000" cy="9144000"/>
@@ -3245,7 +3246,7 @@
             </a:r>
             <a:br/>
             <a:r>
-              <a:t>v2.0 — 2026-04-12（Supabase版）</a:t>
+              <a:t>v3.0 — 2026-04-13</a:t>
             </a:r>
           </a:p>
         </p:txBody>
@@ -21980,6 +21981,147 @@
             </a:pPr>
             <a:r>
               <a:t>#purchase-ops チャンネル または DM</a:t>
+            </a:r>
+          </a:p>
+        </p:txBody>
+      </p:sp>
+    </p:spTree>
+  </p:cSld>
+  <p:clrMapOvr>
+    <a:masterClrMapping/>
+  </p:clrMapOvr>
+</p:sld>
+</file>
+
+<file path=ppt/slides/slide55.xml><?xml version="1.0" encoding="utf-8"?>
+<p:sld xmlns:a="http://schemas.openxmlformats.org/drawingml/2006/main" xmlns:p="http://schemas.openxmlformats.org/presentationml/2006/main" xmlns:r="http://schemas.openxmlformats.org/officeDocument/2006/relationships">
+  <p:cSld>
+    <p:spTree>
+      <p:nvGrpSpPr>
+        <p:cNvPr id="1" name=""/>
+        <p:cNvGrpSpPr/>
+        <p:nvPr/>
+      </p:nvGrpSpPr>
+      <p:grpSpPr/>
+      <p:sp>
+        <p:nvSpPr>
+          <p:cNvPr id="2" name="Title 1"/>
+          <p:cNvSpPr>
+            <a:spLocks noGrp="1"/>
+          </p:cNvSpPr>
+          <p:nvPr>
+            <p:ph type="title"/>
+          </p:nvPr>
+        </p:nvSpPr>
+        <p:spPr/>
+        <p:txBody>
+          <a:bodyPr/>
+          <a:lstStyle/>
+          <a:p>
+            <a:r>
+              <a:rPr sz="2800" b="1"/>
+              <a:t>新機能: 検索・AIアシスタント</a:t>
+            </a:r>
+          </a:p>
+        </p:txBody>
+      </p:sp>
+      <p:sp>
+        <p:nvSpPr>
+          <p:cNvPr id="3" name="Content Placeholder 2"/>
+          <p:cNvSpPr>
+            <a:spLocks noGrp="1"/>
+          </p:cNvSpPr>
+          <p:nvPr>
+            <p:ph idx="1"/>
+          </p:nvPr>
+        </p:nvSpPr>
+        <p:spPr/>
+        <p:txBody>
+          <a:bodyPr/>
+          <a:lstStyle/>
+          <a:p>
+            <a:pPr>
+              <a:spcAft>
+                <a:spcPts val="600"/>
+              </a:spcAft>
+              <a:defRPr sz="1600"/>
+            </a:pPr>
+            <a:r>
+              <a:t>マイページ全文検索（/purchase/my）</a:t>
+            </a:r>
+          </a:p>
+          <a:p>
+            <a:pPr>
+              <a:spcAft>
+                <a:spcPts val="600"/>
+              </a:spcAft>
+              <a:defRPr sz="1600"/>
+            </a:pPr>
+            <a:r>
+              <a:t>  → 検索バーにキーワード入力で過去の申請を検索</a:t>
+            </a:r>
+          </a:p>
+          <a:p>
+            <a:pPr>
+              <a:spcAft>
+                <a:spcPts val="600"/>
+              </a:spcAft>
+              <a:defRPr sz="1600"/>
+            </a:pPr>
+            <a:r>
+              <a:t>  → 品目名・仕入先名・備考を部分一致</a:t>
+            </a:r>
+          </a:p>
+          <a:p>
+            <a:pPr>
+              <a:spcAft>
+                <a:spcPts val="600"/>
+              </a:spcAft>
+              <a:defRPr sz="1600"/>
+            </a:pPr>
+          </a:p>
+          <a:p>
+            <a:pPr>
+              <a:spcAft>
+                <a:spcPts val="600"/>
+              </a:spcAft>
+              <a:defRPr sz="1600"/>
+            </a:pPr>
+            <a:r>
+              <a:t>Slack AIアシスタント（/ask）</a:t>
+            </a:r>
+          </a:p>
+          <a:p>
+            <a:pPr>
+              <a:spcAft>
+                <a:spcPts val="600"/>
+              </a:spcAft>
+              <a:defRPr sz="1600"/>
+            </a:pPr>
+            <a:r>
+              <a:t>  → Slackから購買・出張に関する質問ができる</a:t>
+            </a:r>
+          </a:p>
+          <a:p>
+            <a:pPr>
+              <a:spcAft>
+                <a:spcPts val="600"/>
+              </a:spcAft>
+              <a:defRPr sz="1600"/>
+            </a:pPr>
+            <a:r>
+              <a:t>  → 例: /ask 先月のモニター購入は？</a:t>
+            </a:r>
+          </a:p>
+          <a:p>
+            <a:pPr>
+              <a:spcAft>
+                <a:spcPts val="600"/>
+              </a:spcAft>
+              <a:defRPr sz="1600"/>
+            </a:pPr>
+            <a:r>
+              <a:t>  → 購買データに基づいたAI回答が即座に返る</a:t>
             </a:r>
           </a:p>
         </p:txBody>
